--- a/Manuscript/Figure 2.pptx
+++ b/Manuscript/Figure 2.pptx
@@ -115,7 +115,7 @@
 <file path=ppt/revisionInfo.xml><?xml version="1.0" encoding="utf-8"?>
 <p1510:revInfo xmlns:a="http://schemas.openxmlformats.org/drawingml/2006/main" xmlns:r="http://schemas.openxmlformats.org/officeDocument/2006/relationships" xmlns:p1510="http://schemas.microsoft.com/office/powerpoint/2015/10/main">
   <p1510:revLst>
-    <p1510:client id="{D7312D0F-5834-4339-BAF3-ADCEE9013231}" v="6" dt="2025-10-16T15:41:39.128"/>
+    <p1510:client id="{D3A2A52C-31CB-47BE-A658-4425FB0DB3D1}" v="4" dt="2025-10-30T16:29:41.681"/>
   </p1510:revLst>
 </p1510:revInfo>
 </file>
@@ -135,38 +135,6 @@
           <pc:docMk/>
           <pc:sldMk cId="2157763358" sldId="256"/>
         </pc:sldMkLst>
-        <pc:spChg chg="add del mod">
-          <ac:chgData name="Bikram Adhikari (bdhikari)" userId="82db7b63-ebde-4781-8e8d-5e4948076394" providerId="ADAL" clId="{D7312D0F-5834-4339-BAF3-ADCEE9013231}" dt="2025-10-16T15:42:38.860" v="34" actId="478"/>
-          <ac:spMkLst>
-            <pc:docMk/>
-            <pc:sldMk cId="2157763358" sldId="256"/>
-            <ac:spMk id="2" creationId="{32000F53-A318-C23B-5F9A-7105CE79D478}"/>
-          </ac:spMkLst>
-        </pc:spChg>
-        <pc:spChg chg="add del mod">
-          <ac:chgData name="Bikram Adhikari (bdhikari)" userId="82db7b63-ebde-4781-8e8d-5e4948076394" providerId="ADAL" clId="{D7312D0F-5834-4339-BAF3-ADCEE9013231}" dt="2025-10-16T15:42:32.125" v="32" actId="478"/>
-          <ac:spMkLst>
-            <pc:docMk/>
-            <pc:sldMk cId="2157763358" sldId="256"/>
-            <ac:spMk id="3" creationId="{9F3B982A-0898-B955-4DC7-C6EA4FA57FE8}"/>
-          </ac:spMkLst>
-        </pc:spChg>
-        <pc:spChg chg="add del mod">
-          <ac:chgData name="Bikram Adhikari (bdhikari)" userId="82db7b63-ebde-4781-8e8d-5e4948076394" providerId="ADAL" clId="{D7312D0F-5834-4339-BAF3-ADCEE9013231}" dt="2025-10-16T15:42:34.156" v="33" actId="478"/>
-          <ac:spMkLst>
-            <pc:docMk/>
-            <pc:sldMk cId="2157763358" sldId="256"/>
-            <ac:spMk id="4" creationId="{EBE9D2CC-A6E1-9683-A667-5C0953D42AF3}"/>
-          </ac:spMkLst>
-        </pc:spChg>
-        <pc:spChg chg="add del mod">
-          <ac:chgData name="Bikram Adhikari (bdhikari)" userId="82db7b63-ebde-4781-8e8d-5e4948076394" providerId="ADAL" clId="{D7312D0F-5834-4339-BAF3-ADCEE9013231}" dt="2025-10-16T15:42:41.632" v="35" actId="478"/>
-          <ac:spMkLst>
-            <pc:docMk/>
-            <pc:sldMk cId="2157763358" sldId="256"/>
-            <ac:spMk id="5" creationId="{A9829338-7AAA-5DD4-3C02-66DF97036F5F}"/>
-          </ac:spMkLst>
-        </pc:spChg>
         <pc:spChg chg="mod">
           <ac:chgData name="Bikram Adhikari (bdhikari)" userId="82db7b63-ebde-4781-8e8d-5e4948076394" providerId="ADAL" clId="{D7312D0F-5834-4339-BAF3-ADCEE9013231}" dt="2025-10-16T15:41:56.557" v="30" actId="1035"/>
           <ac:spMkLst>
@@ -231,6 +199,110 @@
             <ac:graphicFrameMk id="14" creationId="{348E2C99-E788-4770-A579-BDD0102B6C73}"/>
           </ac:graphicFrameMkLst>
         </pc:graphicFrameChg>
+      </pc:sldChg>
+    </pc:docChg>
+  </pc:docChgLst>
+  <pc:docChgLst>
+    <pc:chgData name="Bikram Adhikari (bdhikari)" userId="82db7b63-ebde-4781-8e8d-5e4948076394" providerId="ADAL" clId="{D3A2A52C-31CB-47BE-A658-4425FB0DB3D1}"/>
+    <pc:docChg chg="modSld">
+      <pc:chgData name="Bikram Adhikari (bdhikari)" userId="82db7b63-ebde-4781-8e8d-5e4948076394" providerId="ADAL" clId="{D3A2A52C-31CB-47BE-A658-4425FB0DB3D1}" dt="2025-10-30T16:30:49.447" v="32" actId="1036"/>
+      <pc:docMkLst>
+        <pc:docMk/>
+      </pc:docMkLst>
+      <pc:sldChg chg="addSp modSp mod">
+        <pc:chgData name="Bikram Adhikari (bdhikari)" userId="82db7b63-ebde-4781-8e8d-5e4948076394" providerId="ADAL" clId="{D3A2A52C-31CB-47BE-A658-4425FB0DB3D1}" dt="2025-10-30T16:30:49.447" v="32" actId="1036"/>
+        <pc:sldMkLst>
+          <pc:docMk/>
+          <pc:sldMk cId="2157763358" sldId="256"/>
+        </pc:sldMkLst>
+        <pc:spChg chg="add mod">
+          <ac:chgData name="Bikram Adhikari (bdhikari)" userId="82db7b63-ebde-4781-8e8d-5e4948076394" providerId="ADAL" clId="{D3A2A52C-31CB-47BE-A658-4425FB0DB3D1}" dt="2025-10-30T16:30:37.424" v="20" actId="1038"/>
+          <ac:spMkLst>
+            <pc:docMk/>
+            <pc:sldMk cId="2157763358" sldId="256"/>
+            <ac:spMk id="5" creationId="{E749A8A2-615A-81B2-021B-D1C22859450C}"/>
+          </ac:spMkLst>
+        </pc:spChg>
+        <pc:spChg chg="mod">
+          <ac:chgData name="Bikram Adhikari (bdhikari)" userId="82db7b63-ebde-4781-8e8d-5e4948076394" providerId="ADAL" clId="{D3A2A52C-31CB-47BE-A658-4425FB0DB3D1}" dt="2025-10-30T16:30:21.575" v="12" actId="1036"/>
+          <ac:spMkLst>
+            <pc:docMk/>
+            <pc:sldMk cId="2157763358" sldId="256"/>
+            <ac:spMk id="16" creationId="{F28C2540-4686-F982-5B3F-F522C4181B84}"/>
+          </ac:spMkLst>
+        </pc:spChg>
+        <pc:spChg chg="mod">
+          <ac:chgData name="Bikram Adhikari (bdhikari)" userId="82db7b63-ebde-4781-8e8d-5e4948076394" providerId="ADAL" clId="{D3A2A52C-31CB-47BE-A658-4425FB0DB3D1}" dt="2025-10-30T16:30:49.447" v="32" actId="1036"/>
+          <ac:spMkLst>
+            <pc:docMk/>
+            <pc:sldMk cId="2157763358" sldId="256"/>
+            <ac:spMk id="17" creationId="{870EBBA5-B922-8F33-DA08-7073CB6AB8A2}"/>
+          </ac:spMkLst>
+        </pc:spChg>
+        <pc:spChg chg="mod">
+          <ac:chgData name="Bikram Adhikari (bdhikari)" userId="82db7b63-ebde-4781-8e8d-5e4948076394" providerId="ADAL" clId="{D3A2A52C-31CB-47BE-A658-4425FB0DB3D1}" dt="2025-10-30T16:30:49.447" v="32" actId="1036"/>
+          <ac:spMkLst>
+            <pc:docMk/>
+            <pc:sldMk cId="2157763358" sldId="256"/>
+            <ac:spMk id="18" creationId="{42BF82E0-06F4-CF1E-84CA-B5EC7A460E42}"/>
+          </ac:spMkLst>
+        </pc:spChg>
+        <pc:spChg chg="mod">
+          <ac:chgData name="Bikram Adhikari (bdhikari)" userId="82db7b63-ebde-4781-8e8d-5e4948076394" providerId="ADAL" clId="{D3A2A52C-31CB-47BE-A658-4425FB0DB3D1}" dt="2025-10-30T16:30:21.575" v="12" actId="1036"/>
+          <ac:spMkLst>
+            <pc:docMk/>
+            <pc:sldMk cId="2157763358" sldId="256"/>
+            <ac:spMk id="19" creationId="{817F4A46-6FC2-86EB-6157-C255188F5EF9}"/>
+          </ac:spMkLst>
+        </pc:spChg>
+        <pc:graphicFrameChg chg="mod">
+          <ac:chgData name="Bikram Adhikari (bdhikari)" userId="82db7b63-ebde-4781-8e8d-5e4948076394" providerId="ADAL" clId="{D3A2A52C-31CB-47BE-A658-4425FB0DB3D1}" dt="2025-10-30T16:30:21.575" v="12" actId="1036"/>
+          <ac:graphicFrameMkLst>
+            <pc:docMk/>
+            <pc:sldMk cId="2157763358" sldId="256"/>
+            <ac:graphicFrameMk id="11" creationId="{4AB35C75-1299-4600-9AE5-44523D4AA35E}"/>
+          </ac:graphicFrameMkLst>
+        </pc:graphicFrameChg>
+        <pc:graphicFrameChg chg="mod">
+          <ac:chgData name="Bikram Adhikari (bdhikari)" userId="82db7b63-ebde-4781-8e8d-5e4948076394" providerId="ADAL" clId="{D3A2A52C-31CB-47BE-A658-4425FB0DB3D1}" dt="2025-10-30T16:30:49.447" v="32" actId="1036"/>
+          <ac:graphicFrameMkLst>
+            <pc:docMk/>
+            <pc:sldMk cId="2157763358" sldId="256"/>
+            <ac:graphicFrameMk id="12" creationId="{83C070D7-8046-4EC0-B493-A141A8585357}"/>
+          </ac:graphicFrameMkLst>
+        </pc:graphicFrameChg>
+        <pc:graphicFrameChg chg="mod">
+          <ac:chgData name="Bikram Adhikari (bdhikari)" userId="82db7b63-ebde-4781-8e8d-5e4948076394" providerId="ADAL" clId="{D3A2A52C-31CB-47BE-A658-4425FB0DB3D1}" dt="2025-10-30T16:30:49.447" v="32" actId="1036"/>
+          <ac:graphicFrameMkLst>
+            <pc:docMk/>
+            <pc:sldMk cId="2157763358" sldId="256"/>
+            <ac:graphicFrameMk id="13" creationId="{24F243EA-328B-4160-98D9-6E04AE13CA45}"/>
+          </ac:graphicFrameMkLst>
+        </pc:graphicFrameChg>
+        <pc:graphicFrameChg chg="mod">
+          <ac:chgData name="Bikram Adhikari (bdhikari)" userId="82db7b63-ebde-4781-8e8d-5e4948076394" providerId="ADAL" clId="{D3A2A52C-31CB-47BE-A658-4425FB0DB3D1}" dt="2025-10-30T16:30:21.575" v="12" actId="1036"/>
+          <ac:graphicFrameMkLst>
+            <pc:docMk/>
+            <pc:sldMk cId="2157763358" sldId="256"/>
+            <ac:graphicFrameMk id="14" creationId="{348E2C99-E788-4770-A579-BDD0102B6C73}"/>
+          </ac:graphicFrameMkLst>
+        </pc:graphicFrameChg>
+        <pc:graphicFrameChg chg="mod">
+          <ac:chgData name="Bikram Adhikari (bdhikari)" userId="82db7b63-ebde-4781-8e8d-5e4948076394" providerId="ADAL" clId="{D3A2A52C-31CB-47BE-A658-4425FB0DB3D1}" dt="2025-10-30T16:30:43.776" v="29" actId="1036"/>
+          <ac:graphicFrameMkLst>
+            <pc:docMk/>
+            <pc:sldMk cId="2157763358" sldId="256"/>
+            <ac:graphicFrameMk id="15" creationId="{FA1A943B-222F-914B-BADF-88082FECBCBD}"/>
+          </ac:graphicFrameMkLst>
+        </pc:graphicFrameChg>
+        <pc:picChg chg="add mod">
+          <ac:chgData name="Bikram Adhikari (bdhikari)" userId="82db7b63-ebde-4781-8e8d-5e4948076394" providerId="ADAL" clId="{D3A2A52C-31CB-47BE-A658-4425FB0DB3D1}" dt="2025-10-30T16:29:40.467" v="0"/>
+          <ac:picMkLst>
+            <pc:docMk/>
+            <pc:sldMk cId="2157763358" sldId="256"/>
+            <ac:picMk id="3" creationId="{F5281E03-A982-1347-CAEC-843047B01FE8}"/>
+          </ac:picMkLst>
+        </pc:picChg>
       </pc:sldChg>
     </pc:docChg>
   </pc:docChgLst>
@@ -353,7 +425,7 @@
                   <a:bodyPr/>
                   <a:lstStyle/>
                   <a:p>
-                    <a:fld id="{25A8BBC1-7658-4AA7-A56C-8D94CA4108C2}" type="CELLRANGE">
+                    <a:fld id="{F3838F8F-C297-4E22-992A-1F26FA703EA0}" type="CELLRANGE">
                       <a:rPr lang="en-US"/>
                       <a:pPr/>
                       <a:t>[CELLRANGE]</a:t>
@@ -387,7 +459,7 @@
                   <a:bodyPr/>
                   <a:lstStyle/>
                   <a:p>
-                    <a:fld id="{F48329B7-9015-43F9-BF82-BDBEF73CF099}" type="CELLRANGE">
+                    <a:fld id="{F62F8EE6-3340-483B-AE25-B42FEE86C576}" type="CELLRANGE">
                       <a:rPr lang="en-US"/>
                       <a:pPr/>
                       <a:t>[CELLRANGE]</a:t>
@@ -421,7 +493,7 @@
                   <a:bodyPr/>
                   <a:lstStyle/>
                   <a:p>
-                    <a:fld id="{FF6ABA00-8FF1-4987-B754-E6B00AC5740B}" type="CELLRANGE">
+                    <a:fld id="{7212ABC0-F2AC-49A9-A65F-2B75743E6FA0}" type="CELLRANGE">
                       <a:rPr lang="en-US"/>
                       <a:pPr/>
                       <a:t>[CELLRANGE]</a:t>
@@ -734,7 +806,7 @@
                   <a:bodyPr/>
                   <a:lstStyle/>
                   <a:p>
-                    <a:fld id="{DE7E548D-C8FA-4D59-AA2F-8EC46CFD616E}" type="CELLRANGE">
+                    <a:fld id="{4E2D4684-EEB5-494E-A707-54FB88DCF35D}" type="CELLRANGE">
                       <a:rPr lang="en-US"/>
                       <a:pPr/>
                       <a:t>[CELLRANGE]</a:t>
@@ -768,7 +840,7 @@
                   <a:bodyPr/>
                   <a:lstStyle/>
                   <a:p>
-                    <a:fld id="{B425161F-6753-43FB-9608-28017CE056D5}" type="CELLRANGE">
+                    <a:fld id="{4100C928-2620-449C-82E5-6FFAA31EE91C}" type="CELLRANGE">
                       <a:rPr lang="en-US"/>
                       <a:pPr/>
                       <a:t>[CELLRANGE]</a:t>
@@ -802,8 +874,8 @@
                   <a:bodyPr/>
                   <a:lstStyle/>
                   <a:p>
-                    <a:fld id="{57B521CD-DBF1-4FC8-909E-BB248829DF37}" type="CELLRANGE">
-                      <a:rPr lang="en-US"/>
+                    <a:fld id="{74FBD8CC-D2D7-4AB0-80A2-2F1903380C4D}" type="CELLRANGE">
+                      <a:rPr lang="en-US" dirty="0"/>
                       <a:pPr/>
                       <a:t>[CELLRANGE]</a:t>
                     </a:fld>
@@ -818,10 +890,10 @@
               <c:showSerName val="0"/>
               <c:showPercent val="0"/>
               <c:showBubbleSize val="0"/>
+              <c:separator>to</c:separator>
               <c:extLst>
                 <c:ext xmlns:c15="http://schemas.microsoft.com/office/drawing/2012/chart" uri="{CE6537A1-D6FC-4f65-9D91-7224C49458BB}">
                   <c15:dlblFieldTable/>
-                  <c15:xForSave val="1"/>
                   <c15:showDataLabelsRange val="1"/>
                 </c:ext>
                 <c:ext xmlns:c16="http://schemas.microsoft.com/office/drawing/2014/chart" uri="{C3380CC4-5D6E-409C-BE32-E72D297353CC}">
@@ -1107,7 +1179,7 @@
                   <a:bodyPr/>
                   <a:lstStyle/>
                   <a:p>
-                    <a:fld id="{7F3C2DAC-CD37-45E7-B76C-B50202E66481}" type="CELLRANGE">
+                    <a:fld id="{6C02BF4D-5A7F-44F8-9EE9-1447A933D0AB}" type="CELLRANGE">
                       <a:rPr lang="en-US"/>
                       <a:pPr/>
                       <a:t>[CELLRANGE]</a:t>
@@ -1140,7 +1212,7 @@
                   <a:bodyPr/>
                   <a:lstStyle/>
                   <a:p>
-                    <a:fld id="{E30B4C9E-6C59-48B9-B539-D1891D90A1AA}" type="CELLRANGE">
+                    <a:fld id="{F2EE894F-147E-495C-906D-D34608BBEE6E}" type="CELLRANGE">
                       <a:rPr lang="en-US"/>
                       <a:pPr/>
                       <a:t>[CELLRANGE]</a:t>
@@ -1174,7 +1246,7 @@
                   <a:bodyPr/>
                   <a:lstStyle/>
                   <a:p>
-                    <a:fld id="{AD7D419C-98DA-4824-83D2-594285277A25}" type="CELLRANGE">
+                    <a:fld id="{A3429D9C-26AD-4435-B930-62C70318A7DC}" type="CELLRANGE">
                       <a:rPr lang="en-US"/>
                       <a:pPr/>
                       <a:t>[CELLRANGE]</a:t>
@@ -1473,7 +1545,7 @@
                   <a:bodyPr/>
                   <a:lstStyle/>
                   <a:p>
-                    <a:fld id="{D3B10D05-0DE7-4318-9516-EEDFC3C6BA1D}" type="CELLRANGE">
+                    <a:fld id="{A8F99725-DFA6-493F-99AB-95CA88D38FCB}" type="CELLRANGE">
                       <a:rPr lang="en-US"/>
                       <a:pPr/>
                       <a:t>[CELLRANGE]</a:t>
@@ -1513,7 +1585,7 @@
                   <a:bodyPr/>
                   <a:lstStyle/>
                   <a:p>
-                    <a:fld id="{8540B07B-FCD2-42DA-8D61-22F1398E0629}" type="CELLRANGE">
+                    <a:fld id="{9F275D32-7C38-45CE-98CB-16EF1104FBC9}" type="CELLRANGE">
                       <a:rPr lang="en-US"/>
                       <a:pPr/>
                       <a:t>[CELLRANGE]</a:t>
@@ -4919,7 +4991,7 @@
           <a:p>
             <a:fld id="{27516964-3D67-4020-B602-C5D313094EDD}" type="datetimeFigureOut">
               <a:rPr lang="en-US" smtClean="0"/>
-              <a:t>10/16/2025</a:t>
+              <a:t>10/30/2025</a:t>
             </a:fld>
             <a:endParaRPr lang="en-US"/>
           </a:p>
@@ -5117,7 +5189,7 @@
           <a:p>
             <a:fld id="{27516964-3D67-4020-B602-C5D313094EDD}" type="datetimeFigureOut">
               <a:rPr lang="en-US" smtClean="0"/>
-              <a:t>10/16/2025</a:t>
+              <a:t>10/30/2025</a:t>
             </a:fld>
             <a:endParaRPr lang="en-US"/>
           </a:p>
@@ -5325,7 +5397,7 @@
           <a:p>
             <a:fld id="{27516964-3D67-4020-B602-C5D313094EDD}" type="datetimeFigureOut">
               <a:rPr lang="en-US" smtClean="0"/>
-              <a:t>10/16/2025</a:t>
+              <a:t>10/30/2025</a:t>
             </a:fld>
             <a:endParaRPr lang="en-US"/>
           </a:p>
@@ -5523,7 +5595,7 @@
           <a:p>
             <a:fld id="{27516964-3D67-4020-B602-C5D313094EDD}" type="datetimeFigureOut">
               <a:rPr lang="en-US" smtClean="0"/>
-              <a:t>10/16/2025</a:t>
+              <a:t>10/30/2025</a:t>
             </a:fld>
             <a:endParaRPr lang="en-US"/>
           </a:p>
@@ -5798,7 +5870,7 @@
           <a:p>
             <a:fld id="{27516964-3D67-4020-B602-C5D313094EDD}" type="datetimeFigureOut">
               <a:rPr lang="en-US" smtClean="0"/>
-              <a:t>10/16/2025</a:t>
+              <a:t>10/30/2025</a:t>
             </a:fld>
             <a:endParaRPr lang="en-US"/>
           </a:p>
@@ -6063,7 +6135,7 @@
           <a:p>
             <a:fld id="{27516964-3D67-4020-B602-C5D313094EDD}" type="datetimeFigureOut">
               <a:rPr lang="en-US" smtClean="0"/>
-              <a:t>10/16/2025</a:t>
+              <a:t>10/30/2025</a:t>
             </a:fld>
             <a:endParaRPr lang="en-US"/>
           </a:p>
@@ -6475,7 +6547,7 @@
           <a:p>
             <a:fld id="{27516964-3D67-4020-B602-C5D313094EDD}" type="datetimeFigureOut">
               <a:rPr lang="en-US" smtClean="0"/>
-              <a:t>10/16/2025</a:t>
+              <a:t>10/30/2025</a:t>
             </a:fld>
             <a:endParaRPr lang="en-US"/>
           </a:p>
@@ -6616,7 +6688,7 @@
           <a:p>
             <a:fld id="{27516964-3D67-4020-B602-C5D313094EDD}" type="datetimeFigureOut">
               <a:rPr lang="en-US" smtClean="0"/>
-              <a:t>10/16/2025</a:t>
+              <a:t>10/30/2025</a:t>
             </a:fld>
             <a:endParaRPr lang="en-US"/>
           </a:p>
@@ -6729,7 +6801,7 @@
           <a:p>
             <a:fld id="{27516964-3D67-4020-B602-C5D313094EDD}" type="datetimeFigureOut">
               <a:rPr lang="en-US" smtClean="0"/>
-              <a:t>10/16/2025</a:t>
+              <a:t>10/30/2025</a:t>
             </a:fld>
             <a:endParaRPr lang="en-US"/>
           </a:p>
@@ -7040,7 +7112,7 @@
           <a:p>
             <a:fld id="{27516964-3D67-4020-B602-C5D313094EDD}" type="datetimeFigureOut">
               <a:rPr lang="en-US" smtClean="0"/>
-              <a:t>10/16/2025</a:t>
+              <a:t>10/30/2025</a:t>
             </a:fld>
             <a:endParaRPr lang="en-US"/>
           </a:p>
@@ -7328,7 +7400,7 @@
           <a:p>
             <a:fld id="{27516964-3D67-4020-B602-C5D313094EDD}" type="datetimeFigureOut">
               <a:rPr lang="en-US" smtClean="0"/>
-              <a:t>10/16/2025</a:t>
+              <a:t>10/30/2025</a:t>
             </a:fld>
             <a:endParaRPr lang="en-US"/>
           </a:p>
@@ -7569,7 +7641,7 @@
           <a:p>
             <a:fld id="{27516964-3D67-4020-B602-C5D313094EDD}" type="datetimeFigureOut">
               <a:rPr lang="en-US" smtClean="0"/>
-              <a:t>10/16/2025</a:t>
+              <a:t>10/30/2025</a:t>
             </a:fld>
             <a:endParaRPr lang="en-US"/>
           </a:p>
@@ -8001,13 +8073,13 @@
           <p:nvPr>
             <p:extLst>
               <p:ext uri="{D42A27DB-BD31-4B8C-83A1-F6EECF244321}">
-                <p14:modId xmlns:p14="http://schemas.microsoft.com/office/powerpoint/2010/main" val="317756191"/>
+                <p14:modId xmlns:p14="http://schemas.microsoft.com/office/powerpoint/2010/main" val="369440898"/>
               </p:ext>
             </p:extLst>
           </p:nvPr>
         </p:nvGraphicFramePr>
         <p:xfrm>
-          <a:off x="5315468" y="3867514"/>
+          <a:off x="5315468" y="3715114"/>
           <a:ext cx="5095875" cy="3435495"/>
         </p:xfrm>
         <a:graphic>
@@ -8031,13 +8103,13 @@
           <p:nvPr>
             <p:extLst>
               <p:ext uri="{D42A27DB-BD31-4B8C-83A1-F6EECF244321}">
-                <p14:modId xmlns:p14="http://schemas.microsoft.com/office/powerpoint/2010/main" val="4025074290"/>
+                <p14:modId xmlns:p14="http://schemas.microsoft.com/office/powerpoint/2010/main" val="1617277940"/>
               </p:ext>
             </p:extLst>
           </p:nvPr>
         </p:nvGraphicFramePr>
         <p:xfrm>
-          <a:off x="-226238" y="347160"/>
+          <a:off x="-226238" y="404310"/>
           <a:ext cx="5076825" cy="3397395"/>
         </p:xfrm>
         <a:graphic>
@@ -8061,13 +8133,13 @@
           <p:nvPr>
             <p:extLst>
               <p:ext uri="{D42A27DB-BD31-4B8C-83A1-F6EECF244321}">
-                <p14:modId xmlns:p14="http://schemas.microsoft.com/office/powerpoint/2010/main" val="1524774127"/>
+                <p14:modId xmlns:p14="http://schemas.microsoft.com/office/powerpoint/2010/main" val="1606401920"/>
               </p:ext>
             </p:extLst>
           </p:nvPr>
         </p:nvGraphicFramePr>
         <p:xfrm>
-          <a:off x="5364825" y="344258"/>
+          <a:off x="5364825" y="401408"/>
           <a:ext cx="5076825" cy="3394797"/>
         </p:xfrm>
         <a:graphic>
@@ -8091,13 +8163,13 @@
           <p:nvPr>
             <p:extLst>
               <p:ext uri="{D42A27DB-BD31-4B8C-83A1-F6EECF244321}">
-                <p14:modId xmlns:p14="http://schemas.microsoft.com/office/powerpoint/2010/main" val="872535431"/>
+                <p14:modId xmlns:p14="http://schemas.microsoft.com/office/powerpoint/2010/main" val="4175350345"/>
               </p:ext>
             </p:extLst>
           </p:nvPr>
         </p:nvGraphicFramePr>
         <p:xfrm>
-          <a:off x="-143674" y="3900419"/>
+          <a:off x="-143674" y="3748019"/>
           <a:ext cx="5114925" cy="3381808"/>
         </p:xfrm>
         <a:graphic>
@@ -8121,13 +8193,13 @@
           <p:nvPr>
             <p:extLst>
               <p:ext uri="{D42A27DB-BD31-4B8C-83A1-F6EECF244321}">
-                <p14:modId xmlns:p14="http://schemas.microsoft.com/office/powerpoint/2010/main" val="2960313382"/>
+                <p14:modId xmlns:p14="http://schemas.microsoft.com/office/powerpoint/2010/main" val="2615496368"/>
               </p:ext>
             </p:extLst>
           </p:nvPr>
         </p:nvGraphicFramePr>
         <p:xfrm>
-          <a:off x="9121060" y="981702"/>
+          <a:off x="9121060" y="962652"/>
           <a:ext cx="5114925" cy="3381808"/>
         </p:xfrm>
         <a:graphic>
@@ -8150,7 +8222,7 @@
         </p:nvSpPr>
         <p:spPr>
           <a:xfrm>
-            <a:off x="5393709" y="3533380"/>
+            <a:off x="5393709" y="3380980"/>
             <a:ext cx="4746520" cy="369332"/>
           </a:xfrm>
           <a:prstGeom prst="rect">
@@ -8188,7 +8260,7 @@
         </p:nvSpPr>
         <p:spPr>
           <a:xfrm>
-            <a:off x="165620" y="-25074"/>
+            <a:off x="165620" y="32076"/>
             <a:ext cx="6086615" cy="369332"/>
           </a:xfrm>
           <a:prstGeom prst="rect">
@@ -8207,21 +8279,7 @@
                 <a:latin typeface="Times New Roman" panose="02020603050405020304" pitchFamily="18" charset="0"/>
                 <a:cs typeface="Times New Roman" panose="02020603050405020304" pitchFamily="18" charset="0"/>
               </a:rPr>
-              <a:t>B. Children aged 6 months </a:t>
-            </a:r>
-            <a:r>
-              <a:rPr lang="en-US">
-                <a:latin typeface="Times New Roman" panose="02020603050405020304" pitchFamily="18" charset="0"/>
-                <a:cs typeface="Times New Roman" panose="02020603050405020304" pitchFamily="18" charset="0"/>
-              </a:rPr>
-              <a:t>to 11 </a:t>
-            </a:r>
-            <a:r>
-              <a:rPr lang="en-US" dirty="0">
-                <a:latin typeface="Times New Roman" panose="02020603050405020304" pitchFamily="18" charset="0"/>
-                <a:cs typeface="Times New Roman" panose="02020603050405020304" pitchFamily="18" charset="0"/>
-              </a:rPr>
-              <a:t>months (Late infants)</a:t>
+              <a:t>B. Children aged 6 months to 11 months (Late infants)</a:t>
             </a:r>
           </a:p>
         </p:txBody>
@@ -8240,7 +8298,7 @@
         </p:nvSpPr>
         <p:spPr>
           <a:xfrm>
-            <a:off x="5426832" y="-32238"/>
+            <a:off x="5426832" y="24912"/>
             <a:ext cx="4746519" cy="369332"/>
           </a:xfrm>
           <a:prstGeom prst="rect">
@@ -8278,7 +8336,7 @@
         </p:nvSpPr>
         <p:spPr>
           <a:xfrm>
-            <a:off x="165056" y="3523924"/>
+            <a:off x="165056" y="3371524"/>
             <a:ext cx="4454769" cy="369332"/>
           </a:xfrm>
           <a:prstGeom prst="rect">
@@ -8298,6 +8356,41 @@
                 <a:cs typeface="Times New Roman" panose="02020603050405020304" pitchFamily="18" charset="0"/>
               </a:rPr>
               <a:t>D. Children aged 4 to 5 years (Preschool)</a:t>
+            </a:r>
+          </a:p>
+        </p:txBody>
+      </p:sp>
+      <p:sp>
+        <p:nvSpPr>
+          <p:cNvPr id="5" name="TextBox 4">
+            <a:extLst>
+              <a:ext uri="{FF2B5EF4-FFF2-40B4-BE49-F238E27FC236}">
+                <a16:creationId xmlns:a16="http://schemas.microsoft.com/office/drawing/2014/main" id="{E749A8A2-615A-81B2-021B-D1C22859450C}"/>
+              </a:ext>
+            </a:extLst>
+          </p:cNvPr>
+          <p:cNvSpPr txBox="1"/>
+          <p:nvPr/>
+        </p:nvSpPr>
+        <p:spPr>
+          <a:xfrm>
+            <a:off x="8520113" y="6513742"/>
+            <a:ext cx="3881437" cy="369332"/>
+          </a:xfrm>
+          <a:prstGeom prst="rect">
+            <a:avLst/>
+          </a:prstGeom>
+          <a:noFill/>
+        </p:spPr>
+        <p:txBody>
+          <a:bodyPr wrap="square">
+            <a:spAutoFit/>
+          </a:bodyPr>
+          <a:lstStyle/>
+          <a:p>
+            <a:r>
+              <a:rPr lang="en-US" dirty="0"/>
+              <a:t>Values are expressed as % (95% CI)</a:t>
             </a:r>
           </a:p>
         </p:txBody>
